--- a/results/figures/results_deck/results_figures.pptx
+++ b/results/figures/results_deck/results_figures.pptx
@@ -11,9 +11,10 @@
     <p:sldId id="259" r:id="rId5"/>
     <p:sldId id="260" r:id="rId6"/>
     <p:sldId id="261" r:id="rId7"/>
+    <p:sldId id="262" r:id="rId8"/>
   </p:sldIdLst>
   <p:notesMasterIdLst>
-    <p:notesMasterId r:id="rId8"/>
+    <p:notesMasterId r:id="rId9"/>
   </p:notesMasterIdLst>
   <p:sldSz cx="12192000" cy="6858000"/>
   <p:notesSz cx="6858000" cy="12192000"/>
@@ -859,7 +860,7 @@
           <a:p>
             <a:r>
               <a:rPr lang="en-US" dirty="0"/>
-              <a:t/>
+              <a:t>Execution time measured with a warm-up run first (the first batch of the original run absorbed a ~1 s cold start; those 12 parts were re-timed).</a:t>
             </a:r>
             <a:endParaRPr lang="en-US" dirty="0"/>
           </a:p>
@@ -947,7 +948,7 @@
           <a:p>
             <a:r>
               <a:rPr lang="en-US" dirty="0"/>
-              <a:t>Lowest-IoU served parts on the synthetic test pool (e55 best of 8, medoid shown). Failure-mode labels are by inspection.</a:t>
+              <a:t/>
             </a:r>
             <a:endParaRPr lang="en-US" dirty="0"/>
           </a:p>
@@ -971,6 +972,94 @@
             <a:fld id="{F7021451-1387-4CA6-816F-3879F97B5CBC}" type="slidenum">
               <a:rPr lang="en-US"/>
               <a:t>6</a:t>
+            </a:fld>
+            <a:endParaRPr lang="en-US"/>
+          </a:p>
+        </p:txBody>
+      </p:sp>
+    </p:spTree>
+    <p:extLst>
+      <p:ext uri="{BB962C8B-B14F-4D97-AF65-F5344CB8AC3E}">
+        <p14:creationId xmlns:p14="http://schemas.microsoft.com/office/powerpoint/2010/main" val="1024086991"/>
+      </p:ext>
+    </p:extLst>
+  </p:cSld>
+  <p:clrMapOvr>
+    <a:masterClrMapping/>
+  </p:clrMapOvr>
+</p:notes>
+</file>
+
+<file path=ppt/notesSlides/notesSlide7.xml><?xml version="1.0" encoding="utf-8"?>
+<p:notes xmlns:a="http://schemas.openxmlformats.org/drawingml/2006/main" xmlns:r="http://schemas.openxmlformats.org/officeDocument/2006/relationships" xmlns:p="http://schemas.openxmlformats.org/presentationml/2006/main">
+  <p:cSld>
+    <p:spTree>
+      <p:nvGrpSpPr>
+        <p:cNvPr id="1" name=""/>
+        <p:cNvGrpSpPr/>
+        <p:nvPr/>
+      </p:nvGrpSpPr>
+      <p:grpSpPr>
+        <a:xfrm>
+          <a:off x="0" y="0"/>
+          <a:ext cx="0" cy="0"/>
+          <a:chOff x="0" y="0"/>
+          <a:chExt cx="0" cy="0"/>
+        </a:xfrm>
+      </p:grpSpPr>
+      <p:sp>
+        <p:nvSpPr>
+          <p:cNvPr id="2" name="Slide Image Placeholder 1"/>
+          <p:cNvSpPr>
+            <a:spLocks noGrp="1" noRot="1" noChangeAspect="1"/>
+          </p:cNvSpPr>
+          <p:nvPr>
+            <p:ph type="sldImg"/>
+          </p:nvPr>
+        </p:nvSpPr>
+        <p:spPr/>
+      </p:sp>
+      <p:sp>
+        <p:nvSpPr>
+          <p:cNvPr id="3" name="Notes Placeholder 2"/>
+          <p:cNvSpPr>
+            <a:spLocks noGrp="1"/>
+          </p:cNvSpPr>
+          <p:nvPr>
+            <p:ph type="body" idx="1"/>
+          </p:nvPr>
+        </p:nvSpPr>
+        <p:spPr/>
+        <p:txBody>
+          <a:bodyPr/>
+          <a:lstStyle/>
+          <a:p>
+            <a:r>
+              <a:rPr lang="en-US" dirty="0"/>
+              <a:t>Lowest-IoU served parts on the synthetic test pool (e55 best of 8, medoid shown). Failure-mode labels are by inspection.</a:t>
+            </a:r>
+            <a:endParaRPr lang="en-US" dirty="0"/>
+          </a:p>
+        </p:txBody>
+      </p:sp>
+      <p:sp>
+        <p:nvSpPr>
+          <p:cNvPr id="4" name="Slide Number Placeholder 3"/>
+          <p:cNvSpPr>
+            <a:spLocks noGrp="1"/>
+          </p:cNvSpPr>
+          <p:nvPr>
+            <p:ph type="sldNum" sz="quarter" idx="10"/>
+          </p:nvPr>
+        </p:nvSpPr>
+        <p:spPr/>
+        <p:txBody>
+          <a:bodyPr/>
+          <a:lstStyle/>
+          <a:p>
+            <a:fld id="{F7021451-1387-4CA6-816F-3879F97B5CBC}" type="slidenum">
+              <a:rPr lang="en-US"/>
+              <a:t>7</a:t>
             </a:fld>
             <a:endParaRPr lang="en-US"/>
           </a:p>
@@ -2728,7 +2817,7 @@
                   <a:schemeClr val="tx1"/>
                 </a:solidFill>
               </a:rPr>
-              <a:t>Median 0.12 s, 95th percentile 0.42 s, max 3.3 s (n=1012)</a:t>
+              <a:t>Median 0.12 s, 95th percentile 0.41 s, max 3.3 s (n=1012)</a:t>
             </a:r>
             <a:endParaRPr lang="en-US" sz="1600" dirty="0"/>
           </a:p>
@@ -2746,7 +2835,7 @@
                   <a:schemeClr val="tx1"/>
                 </a:solidFill>
               </a:rPr>
-              <a:t>Spearman ρ = -0.27 with IoU</a:t>
+              <a:t>Spearman ρ = -0.28 with IoU</a:t>
             </a:r>
             <a:endParaRPr lang="en-US" sz="1600" dirty="0"/>
           </a:p>
@@ -2764,7 +2853,7 @@
                   <a:schemeClr val="tx1"/>
                 </a:solidFill>
               </a:rPr>
-              <a:t>Parts at IoU ≥ 0.85 median 0.11 s vs 0.13 s below</a:t>
+              <a:t>Parts at IoU ≥ 0.85 median 0.11 s vs 0.13 s below</a:t>
             </a:r>
             <a:endParaRPr lang="en-US" sz="1600" dirty="0"/>
           </a:p>
@@ -2827,7 +2916,7 @@
                   <a:schemeClr val="tx2"/>
                 </a:solidFill>
               </a:rPr>
-              <a:t>Distribution of IoU</a:t>
+              <a:t>Face Count vs Execution Time</a:t>
             </a:r>
             <a:endParaRPr lang="en-US" sz="3200" dirty="0"/>
           </a:p>
@@ -2835,7 +2924,7 @@
       </p:sp>
       <p:pic>
         <p:nvPicPr>
-          <p:cNvPr id="3" name="iou_hist chart" descr="iou hist">    </p:cNvPr>
+          <p:cNvPr id="3" name="faces_vs_exectime chart" descr="faces vs exectime">    </p:cNvPr>
           <p:cNvPicPr>
             <a:picLocks noChangeAspect="1"/>
           </p:cNvPicPr>
@@ -2855,6 +2944,247 @@
         </p:blipFill>
         <p:spPr>
           <a:xfrm>
+            <a:off x="548640" y="1143000"/>
+            <a:ext cx="5257800" cy="5146473"/>
+          </a:xfrm>
+          <a:prstGeom prst="rect">
+            <a:avLst/>
+          </a:prstGeom>
+        </p:spPr>
+      </p:pic>
+      <p:sp>
+        <p:nvSpPr>
+          <p:cNvPr id="4" name="takeaways"/>
+          <p:cNvSpPr txBox="1"/>
+          <p:nvPr/>
+        </p:nvSpPr>
+        <p:spPr>
+          <a:xfrm>
+            <a:off x="6400800" y="1463040"/>
+            <a:ext cx="5303520" cy="4206240"/>
+          </a:xfrm>
+          <a:prstGeom prst="rect">
+            <a:avLst/>
+          </a:prstGeom>
+          <a:noFill/>
+          <a:ln/>
+        </p:spPr>
+        <p:txBody>
+          <a:bodyPr wrap="square" lIns="0" tIns="0" rIns="0" bIns="0" rtlCol="0" anchor="t"/>
+          <a:lstStyle/>
+          <a:p>
+            <a:pPr marL="342900" indent="-342900">
+              <a:spcAft>
+                <a:spcPts val="1000"/>
+              </a:spcAft>
+              <a:buSzPct val="100000"/>
+              <a:buChar char="•"/>
+            </a:pPr>
+            <a:r>
+              <a:rPr lang="en-US" sz="1600" dirty="0">
+                <a:solidFill>
+                  <a:schemeClr val="tx1"/>
+                </a:solidFill>
+              </a:rPr>
+              <a:t>Two complexity measures for the 1012 synthetic test parts: ground-truth face count and the served program's execution time</a:t>
+            </a:r>
+            <a:endParaRPr lang="en-US" sz="1600" dirty="0"/>
+          </a:p>
+          <a:p>
+            <a:pPr marL="342900" indent="-342900">
+              <a:spcAft>
+                <a:spcPts val="1000"/>
+              </a:spcAft>
+              <a:buSzPct val="100000"/>
+              <a:buChar char="•"/>
+            </a:pPr>
+            <a:r>
+              <a:rPr lang="en-US" sz="1600" dirty="0">
+                <a:solidFill>
+                  <a:schemeClr val="tx1"/>
+                </a:solidFill>
+              </a:rPr>
+              <a:t>Spearman ρ = 0.70, r² = 0.49 on log-log axes</a:t>
+            </a:r>
+            <a:endParaRPr lang="en-US" sz="1600" dirty="0"/>
+          </a:p>
+          <a:p>
+            <a:pPr marL="342900" indent="-342900">
+              <a:spcAft>
+                <a:spcPts val="1000"/>
+              </a:spcAft>
+              <a:buSzPct val="100000"/>
+              <a:buChar char="•"/>
+            </a:pPr>
+            <a:r>
+              <a:rPr lang="en-US" sz="1600" dirty="0">
+                <a:solidFill>
+                  <a:schemeClr val="tx1"/>
+                </a:solidFill>
+              </a:rPr>
+              <a:t>≤20 faces (n=363): median 0.07 s, 95th percentile 0.21 s</a:t>
+            </a:r>
+            <a:endParaRPr lang="en-US" sz="1600" dirty="0"/>
+          </a:p>
+          <a:p>
+            <a:pPr marL="342900" indent="-342900">
+              <a:spcAft>
+                <a:spcPts val="1000"/>
+              </a:spcAft>
+              <a:buSzPct val="100000"/>
+              <a:buChar char="•"/>
+            </a:pPr>
+            <a:r>
+              <a:rPr lang="en-US" sz="1600" dirty="0">
+                <a:solidFill>
+                  <a:schemeClr val="tx1"/>
+                </a:solidFill>
+              </a:rPr>
+              <a:t>21–32 faces (n=314): median 0.12 s, 95th percentile 0.24 s</a:t>
+            </a:r>
+            <a:endParaRPr lang="en-US" sz="1600" dirty="0"/>
+          </a:p>
+          <a:p>
+            <a:pPr marL="342900" indent="-342900">
+              <a:spcAft>
+                <a:spcPts val="1000"/>
+              </a:spcAft>
+              <a:buSzPct val="100000"/>
+              <a:buChar char="•"/>
+            </a:pPr>
+            <a:r>
+              <a:rPr lang="en-US" sz="1600" dirty="0">
+                <a:solidFill>
+                  <a:schemeClr val="tx1"/>
+                </a:solidFill>
+              </a:rPr>
+              <a:t>33–60 faces (n=238): median 0.16 s, 95th percentile 0.41 s</a:t>
+            </a:r>
+            <a:endParaRPr lang="en-US" sz="1600" dirty="0"/>
+          </a:p>
+          <a:p>
+            <a:pPr marL="342900" indent="-342900">
+              <a:spcAft>
+                <a:spcPts val="1000"/>
+              </a:spcAft>
+              <a:buSzPct val="100000"/>
+              <a:buChar char="•"/>
+            </a:pPr>
+            <a:r>
+              <a:rPr lang="en-US" sz="1600" dirty="0">
+                <a:solidFill>
+                  <a:schemeClr val="tx1"/>
+                </a:solidFill>
+              </a:rPr>
+              <a:t>&gt;60 faces (n=97): median 0.27 s, 95th percentile 1.63 s</a:t>
+            </a:r>
+            <a:endParaRPr lang="en-US" sz="1600" dirty="0"/>
+          </a:p>
+          <a:p>
+            <a:pPr marL="342900" indent="-342900">
+              <a:spcAft>
+                <a:spcPts val="1000"/>
+              </a:spcAft>
+              <a:buSzPct val="100000"/>
+              <a:buChar char="•"/>
+            </a:pPr>
+            <a:r>
+              <a:rPr lang="en-US" sz="1600" dirty="0">
+                <a:solidFill>
+                  <a:schemeClr val="tx1"/>
+                </a:solidFill>
+              </a:rPr>
+              <a:t>Outliers both ways: some programs with few faces take over a second, and some 100+ face parts build in under 0.1 s</a:t>
+            </a:r>
+            <a:endParaRPr lang="en-US" sz="1600" dirty="0"/>
+          </a:p>
+        </p:txBody>
+      </p:sp>
+    </p:spTree>
+  </p:cSld>
+  <p:clrMapOvr>
+    <a:masterClrMapping/>
+  </p:clrMapOvr>
+</p:sld>
+</file>
+
+<file path=ppt/slides/slide6.xml><?xml version="1.0" encoding="utf-8"?>
+<p:sld xmlns:a="http://schemas.openxmlformats.org/drawingml/2006/main" xmlns:r="http://schemas.openxmlformats.org/officeDocument/2006/relationships" xmlns:p="http://schemas.openxmlformats.org/presentationml/2006/main">
+  <p:cSld name="Slide 6">
+    <p:spTree>
+      <p:nvGrpSpPr>
+        <p:cNvPr id="1" name=""/>
+        <p:cNvGrpSpPr/>
+        <p:nvPr/>
+      </p:nvGrpSpPr>
+      <p:grpSpPr>
+        <a:xfrm>
+          <a:off x="0" y="0"/>
+          <a:ext cx="0" cy="0"/>
+          <a:chOff x="0" y="0"/>
+          <a:chExt cx="0" cy="0"/>
+        </a:xfrm>
+      </p:grpSpPr>
+      <p:sp>
+        <p:nvSpPr>
+          <p:cNvPr id="2" name="Text 0"/>
+          <p:cNvSpPr/>
+          <p:nvPr>
+            <p:ph idx="100" type="title" hasCustomPrompt="1"/>
+          </p:nvPr>
+        </p:nvSpPr>
+        <p:spPr>
+          <a:xfrm>
+            <a:off x="457200" y="274320"/>
+            <a:ext cx="11247120" cy="685800"/>
+          </a:xfrm>
+          <a:prstGeom prst="rect">
+            <a:avLst/>
+          </a:prstGeom>
+          <a:noFill/>
+          <a:ln/>
+        </p:spPr>
+        <p:txBody>
+          <a:bodyPr wrap="square" lIns="0" tIns="0" rIns="0" bIns="0" rtlCol="0" anchor="ctr"/>
+          <a:lstStyle/>
+          <a:p>
+            <a:pPr algn="l" indent="0" marL="0">
+              <a:buNone/>
+            </a:pPr>
+            <a:r>
+              <a:rPr lang="en-US" sz="3200" b="1" dirty="0">
+                <a:solidFill>
+                  <a:schemeClr val="tx2"/>
+                </a:solidFill>
+              </a:rPr>
+              <a:t>Distribution of IoU</a:t>
+            </a:r>
+            <a:endParaRPr lang="en-US" sz="3200" dirty="0"/>
+          </a:p>
+        </p:txBody>
+      </p:sp>
+      <p:pic>
+        <p:nvPicPr>
+          <p:cNvPr id="3" name="iou_hist chart" descr="iou hist">    </p:cNvPr>
+          <p:cNvPicPr>
+            <a:picLocks noChangeAspect="1"/>
+          </p:cNvPicPr>
+          <p:nvPr/>
+        </p:nvPicPr>
+        <p:blipFill>
+          <a:blip r:embed="rId1">
+            <a:extLst>
+              <a:ext uri="{96DAC541-7B7A-43D3-8B79-37D633B846F1}">
+                <asvg:svgBlip xmlns:asvg="http://schemas.microsoft.com/office/drawing/2016/SVG/main" r:embed="rId2"/>
+              </a:ext>
+            </a:extLst>
+          </a:blip>
+          <a:stretch>
+            <a:fillRect/>
+          </a:stretch>
+        </p:blipFill>
+        <p:spPr>
+          <a:xfrm>
             <a:off x="548640" y="1188720"/>
             <a:ext cx="5120640" cy="5036644"/>
           </a:xfrm>
@@ -2937,9 +3267,9 @@
 </p:sld>
 </file>
 
-<file path=ppt/slides/slide6.xml><?xml version="1.0" encoding="utf-8"?>
+<file path=ppt/slides/slide7.xml><?xml version="1.0" encoding="utf-8"?>
 <p:sld xmlns:a="http://schemas.openxmlformats.org/drawingml/2006/main" xmlns:r="http://schemas.openxmlformats.org/officeDocument/2006/relationships" xmlns:p="http://schemas.openxmlformats.org/presentationml/2006/main">
-  <p:cSld name="Slide 6">
+  <p:cSld name="Slide 7">
     <p:spTree>
       <p:nvGrpSpPr>
         <p:cNvPr id="1" name=""/>
